--- a/Winston_Architecture_Deck.pptx
+++ b/Winston_Architecture_Deck.pptx
@@ -10857,7 +10857,7 @@
         <p:spPr>
           <a:xfrm>
             <a:off x="365760" y="4956048"/>
-            <a:ext cx="1371600" cy="182880"/>
+            <a:ext cx="1097280" cy="182880"/>
           </a:xfrm>
           <a:prstGeom prst="rect">
             <a:avLst/>
@@ -10896,7 +10896,7 @@
         <p:spPr>
           <a:xfrm>
             <a:off x="365760" y="5138928"/>
-            <a:ext cx="1371600" cy="182880"/>
+            <a:ext cx="1097280" cy="182880"/>
           </a:xfrm>
           <a:prstGeom prst="rect">
             <a:avLst/>
@@ -10934,8 +10934,8 @@
         </p:nvSpPr>
         <p:spPr>
           <a:xfrm>
-            <a:off x="1792224" y="4956048"/>
-            <a:ext cx="1371600" cy="182880"/>
+            <a:off x="1508760" y="4956048"/>
+            <a:ext cx="1097280" cy="182880"/>
           </a:xfrm>
           <a:prstGeom prst="rect">
             <a:avLst/>
@@ -10973,8 +10973,8 @@
         </p:nvSpPr>
         <p:spPr>
           <a:xfrm>
-            <a:off x="1792224" y="5138928"/>
-            <a:ext cx="1371600" cy="182880"/>
+            <a:off x="1508760" y="5138928"/>
+            <a:ext cx="1097280" cy="182880"/>
           </a:xfrm>
           <a:prstGeom prst="rect">
             <a:avLst/>
@@ -11012,8 +11012,8 @@
         </p:nvSpPr>
         <p:spPr>
           <a:xfrm>
-            <a:off x="3218688" y="4956048"/>
-            <a:ext cx="1371600" cy="182880"/>
+            <a:off x="2651760" y="4956048"/>
+            <a:ext cx="1097280" cy="182880"/>
           </a:xfrm>
           <a:prstGeom prst="rect">
             <a:avLst/>
@@ -11037,7 +11037,7 @@
                 <a:ea typeface="Consolas" pitchFamily="34" charset="-122"/>
                 <a:cs typeface="Consolas" pitchFamily="34" charset="-120"/>
               </a:rPr>
-              <a:t>OPENAI_EMBEDDING_MODEL</a:t>
+              <a:t>OAI_EMBEDDING_MODEL</a:t>
             </a:r>
             <a:endParaRPr lang="en-US" sz="650" dirty="0"/>
           </a:p>
@@ -11051,8 +11051,8 @@
         </p:nvSpPr>
         <p:spPr>
           <a:xfrm>
-            <a:off x="3218688" y="5138928"/>
-            <a:ext cx="1371600" cy="182880"/>
+            <a:off x="2651760" y="5138928"/>
+            <a:ext cx="1097280" cy="182880"/>
           </a:xfrm>
           <a:prstGeom prst="rect">
             <a:avLst/>
@@ -11076,7 +11076,7 @@
                 <a:ea typeface="Calibri" pitchFamily="34" charset="-122"/>
                 <a:cs typeface="Calibri" pitchFamily="34" charset="-120"/>
               </a:rPr>
-              <a:t>text-embedding-3-small</a:t>
+              <a:t>text-embed-3-small</a:t>
             </a:r>
             <a:endParaRPr lang="en-US" sz="650" dirty="0"/>
           </a:p>
@@ -11090,8 +11090,8 @@
         </p:nvSpPr>
         <p:spPr>
           <a:xfrm>
-            <a:off x="4645152" y="4956048"/>
-            <a:ext cx="1371600" cy="182880"/>
+            <a:off x="3794760" y="4956048"/>
+            <a:ext cx="1097280" cy="182880"/>
           </a:xfrm>
           <a:prstGeom prst="rect">
             <a:avLst/>
@@ -11129,8 +11129,8 @@
         </p:nvSpPr>
         <p:spPr>
           <a:xfrm>
-            <a:off x="4645152" y="5138928"/>
-            <a:ext cx="1371600" cy="182880"/>
+            <a:off x="3794760" y="5138928"/>
+            <a:ext cx="1097280" cy="182880"/>
           </a:xfrm>
           <a:prstGeom prst="rect">
             <a:avLst/>
@@ -11154,7 +11154,7 @@
                 <a:ea typeface="Calibri" pitchFamily="34" charset="-122"/>
                 <a:cs typeface="Calibri" pitchFamily="34" charset="-120"/>
               </a:rPr>
-              <a:t>5 (max tool-call cycles)</a:t>
+              <a:t>5 (tool-call cycles)</a:t>
             </a:r>
             <a:endParaRPr lang="en-US" sz="650" dirty="0"/>
           </a:p>
@@ -11168,8 +11168,8 @@
         </p:nvSpPr>
         <p:spPr>
           <a:xfrm>
-            <a:off x="6071616" y="4956048"/>
-            <a:ext cx="1371600" cy="182880"/>
+            <a:off x="4937760" y="4956048"/>
+            <a:ext cx="1097280" cy="182880"/>
           </a:xfrm>
           <a:prstGeom prst="rect">
             <a:avLst/>
@@ -11207,8 +11207,8 @@
         </p:nvSpPr>
         <p:spPr>
           <a:xfrm>
-            <a:off x="6071616" y="5138928"/>
-            <a:ext cx="1371600" cy="182880"/>
+            <a:off x="4937760" y="5138928"/>
+            <a:ext cx="1097280" cy="182880"/>
           </a:xfrm>
           <a:prstGeom prst="rect">
             <a:avLst/>
@@ -11246,8 +11246,8 @@
         </p:nvSpPr>
         <p:spPr>
           <a:xfrm>
-            <a:off x="7498080" y="4956048"/>
-            <a:ext cx="1371600" cy="182880"/>
+            <a:off x="6080760" y="4956048"/>
+            <a:ext cx="1097280" cy="182880"/>
           </a:xfrm>
           <a:prstGeom prst="rect">
             <a:avLst/>
@@ -11285,8 +11285,8 @@
         </p:nvSpPr>
         <p:spPr>
           <a:xfrm>
-            <a:off x="7498080" y="5138928"/>
-            <a:ext cx="1371600" cy="182880"/>
+            <a:off x="6080760" y="5138928"/>
+            <a:ext cx="1097280" cy="182880"/>
           </a:xfrm>
           <a:prstGeom prst="rect">
             <a:avLst/>
@@ -11310,7 +11310,7 @@
                 <a:ea typeface="Calibri" pitchFamily="34" charset="-122"/>
                 <a:cs typeface="Calibri" pitchFamily="34" charset="-120"/>
               </a:rPr>
-              <a:t>400 (child chunk size)</a:t>
+              <a:t>400 (child size)</a:t>
             </a:r>
             <a:endParaRPr lang="en-US" sz="650" dirty="0"/>
           </a:p>
@@ -11324,8 +11324,8 @@
         </p:nvSpPr>
         <p:spPr>
           <a:xfrm>
-            <a:off x="8924544" y="4956048"/>
-            <a:ext cx="1371600" cy="182880"/>
+            <a:off x="7223760" y="4956048"/>
+            <a:ext cx="1097280" cy="182880"/>
           </a:xfrm>
           <a:prstGeom prst="rect">
             <a:avLst/>
@@ -11363,8 +11363,8 @@
         </p:nvSpPr>
         <p:spPr>
           <a:xfrm>
-            <a:off x="8924544" y="5138928"/>
-            <a:ext cx="1371600" cy="182880"/>
+            <a:off x="7223760" y="5138928"/>
+            <a:ext cx="1097280" cy="182880"/>
           </a:xfrm>
           <a:prstGeom prst="rect">
             <a:avLst/>
@@ -11388,7 +11388,7 @@
                 <a:ea typeface="Calibri" pitchFamily="34" charset="-122"/>
                 <a:cs typeface="Calibri" pitchFamily="34" charset="-120"/>
               </a:rPr>
-              <a:t>60</a:t>
+              <a:t>60 req/min</a:t>
             </a:r>
             <a:endParaRPr lang="en-US" sz="650" dirty="0"/>
           </a:p>
@@ -11402,8 +11402,8 @@
         </p:nvSpPr>
         <p:spPr>
           <a:xfrm>
-            <a:off x="10351008" y="4956048"/>
-            <a:ext cx="1371600" cy="182880"/>
+            <a:off x="8366760" y="4956048"/>
+            <a:ext cx="1097280" cy="182880"/>
           </a:xfrm>
           <a:prstGeom prst="rect">
             <a:avLst/>
@@ -11441,8 +11441,8 @@
         </p:nvSpPr>
         <p:spPr>
           <a:xfrm>
-            <a:off x="10351008" y="5138928"/>
-            <a:ext cx="1371600" cy="182880"/>
+            <a:off x="8366760" y="5138928"/>
+            <a:ext cx="1097280" cy="182880"/>
           </a:xfrm>
           <a:prstGeom prst="rect">
             <a:avLst/>
@@ -11466,7 +11466,7 @@
                 <a:ea typeface="Calibri" pitchFamily="34" charset="-122"/>
                 <a:cs typeface="Calibri" pitchFamily="34" charset="-120"/>
               </a:rPr>
-              <a:t>Bearer auth for MCP</a:t>
+              <a:t>Bearer auth</a:t>
             </a:r>
             <a:endParaRPr lang="en-US" sz="650" dirty="0"/>
           </a:p>
